--- a/outputs/Cana_Capital_Fund_I_April_2026_Investor_Deck.pptx
+++ b/outputs/Cana_Capital_Fund_I_April_2026_Investor_Deck.pptx
@@ -2572,12 +2572,12 @@
         </p:nvSpPr>
         <p:spPr>
           <a:xfrm>
-            <a:off x="9235440" y="2468880"/>
-            <a:ext cx="2743200" cy="2743200"/>
+            <a:off x="9144000" y="2468880"/>
+            <a:ext cx="2880360" cy="2926080"/>
           </a:xfrm>
           <a:prstGeom prst="roundRect">
             <a:avLst>
-              <a:gd name="adj" fmla="val 1667"/>
+              <a:gd name="adj" fmla="val 1587"/>
             </a:avLst>
           </a:prstGeom>
           <a:solidFill>
@@ -2594,8 +2594,8 @@
         </p:nvSpPr>
         <p:spPr>
           <a:xfrm>
-            <a:off x="9235440" y="2578608"/>
-            <a:ext cx="2743200" cy="320040"/>
+            <a:off x="9144000" y="2578608"/>
+            <a:ext cx="2880360" cy="347472"/>
           </a:xfrm>
           <a:prstGeom prst="rect">
             <a:avLst/>
@@ -2611,7 +2611,7 @@
               <a:buNone/>
             </a:pPr>
             <a:r>
-              <a:rPr lang="en-US" sz="1100" b="1" dirty="0">
+              <a:rPr lang="en-US" sz="1200" b="1" dirty="0">
                 <a:solidFill>
                   <a:srgbClr val="FFFFFF"/>
                 </a:solidFill>
@@ -2621,7 +2621,7 @@
               </a:rPr>
               <a:t>Fund Health</a:t>
             </a:r>
-            <a:endParaRPr lang="en-US" sz="1100" dirty="0"/>
+            <a:endParaRPr lang="en-US" sz="1200" dirty="0"/>
           </a:p>
         </p:txBody>
       </p:sp>
@@ -2633,8 +2633,8 @@
         </p:nvSpPr>
         <p:spPr>
           <a:xfrm>
-            <a:off x="9235440" y="2898648"/>
-            <a:ext cx="2743200" cy="13716"/>
+            <a:off x="9144000" y="2926080"/>
+            <a:ext cx="2880360" cy="13716"/>
           </a:xfrm>
           <a:prstGeom prst="rect">
             <a:avLst/>
@@ -2653,8 +2653,8 @@
         </p:nvSpPr>
         <p:spPr>
           <a:xfrm>
-            <a:off x="9372600" y="2999232"/>
-            <a:ext cx="2468880" cy="365760"/>
+            <a:off x="9253728" y="3044952"/>
+            <a:ext cx="2651760" cy="402336"/>
           </a:xfrm>
           <a:prstGeom prst="rect">
             <a:avLst/>
@@ -2670,7 +2670,7 @@
               <a:buNone/>
             </a:pPr>
             <a:r>
-              <a:rPr lang="en-US" sz="950" dirty="0">
+              <a:rPr lang="en-US" sz="1050" dirty="0">
                 <a:solidFill>
                   <a:srgbClr val="1A6B3A"/>
                 </a:solidFill>
@@ -2680,7 +2680,7 @@
               </a:rPr>
               <a:t>✓ Preferred Return: CURRENT</a:t>
             </a:r>
-            <a:endParaRPr lang="en-US" sz="950" dirty="0"/>
+            <a:endParaRPr lang="en-US" sz="1050" dirty="0"/>
           </a:p>
         </p:txBody>
       </p:sp>
@@ -2692,8 +2692,8 @@
         </p:nvSpPr>
         <p:spPr>
           <a:xfrm>
-            <a:off x="9372600" y="3438144"/>
-            <a:ext cx="2468880" cy="365760"/>
+            <a:off x="9253728" y="3520440"/>
+            <a:ext cx="2651760" cy="402336"/>
           </a:xfrm>
           <a:prstGeom prst="rect">
             <a:avLst/>
@@ -2709,7 +2709,7 @@
               <a:buNone/>
             </a:pPr>
             <a:r>
-              <a:rPr lang="en-US" sz="950" dirty="0">
+              <a:rPr lang="en-US" sz="1050" dirty="0">
                 <a:solidFill>
                   <a:srgbClr val="1A6B3A"/>
                 </a:solidFill>
@@ -2719,7 +2719,7 @@
               </a:rPr>
               <a:t>✓ Portfolio: 100% Performing</a:t>
             </a:r>
-            <a:endParaRPr lang="en-US" sz="950" dirty="0"/>
+            <a:endParaRPr lang="en-US" sz="1050" dirty="0"/>
           </a:p>
         </p:txBody>
       </p:sp>
@@ -2731,8 +2731,8 @@
         </p:nvSpPr>
         <p:spPr>
           <a:xfrm>
-            <a:off x="9372600" y="3877056"/>
-            <a:ext cx="2468880" cy="365760"/>
+            <a:off x="9253728" y="3995928"/>
+            <a:ext cx="2651760" cy="402336"/>
           </a:xfrm>
           <a:prstGeom prst="rect">
             <a:avLst/>
@@ -2748,7 +2748,7 @@
               <a:buNone/>
             </a:pPr>
             <a:r>
-              <a:rPr lang="en-US" sz="950" dirty="0">
+              <a:rPr lang="en-US" sz="1050" dirty="0">
                 <a:solidFill>
                   <a:srgbClr val="1A6B3A"/>
                 </a:solidFill>
@@ -2758,7 +2758,7 @@
               </a:rPr>
               <a:t>✓ Capital: 75% Deployed</a:t>
             </a:r>
-            <a:endParaRPr lang="en-US" sz="950" dirty="0"/>
+            <a:endParaRPr lang="en-US" sz="1050" dirty="0"/>
           </a:p>
         </p:txBody>
       </p:sp>
@@ -2770,8 +2770,8 @@
         </p:nvSpPr>
         <p:spPr>
           <a:xfrm>
-            <a:off x="9372600" y="4315968"/>
-            <a:ext cx="2468880" cy="365760"/>
+            <a:off x="9253728" y="4471416"/>
+            <a:ext cx="2651760" cy="402336"/>
           </a:xfrm>
           <a:prstGeom prst="rect">
             <a:avLst/>
@@ -2787,7 +2787,7 @@
               <a:buNone/>
             </a:pPr>
             <a:r>
-              <a:rPr lang="en-US" sz="950" dirty="0">
+              <a:rPr lang="en-US" sz="1050" dirty="0">
                 <a:solidFill>
                   <a:srgbClr val="FFFFFF"/>
                 </a:solidFill>
@@ -2797,7 +2797,7 @@
               </a:rPr>
               <a:t>Net IRR: 9.1%</a:t>
             </a:r>
-            <a:endParaRPr lang="en-US" sz="950" dirty="0"/>
+            <a:endParaRPr lang="en-US" sz="1050" dirty="0"/>
           </a:p>
         </p:txBody>
       </p:sp>
@@ -2809,8 +2809,8 @@
         </p:nvSpPr>
         <p:spPr>
           <a:xfrm>
-            <a:off x="9372600" y="4754880"/>
-            <a:ext cx="2468880" cy="365760"/>
+            <a:off x="9253728" y="4946904"/>
+            <a:ext cx="2651760" cy="402336"/>
           </a:xfrm>
           <a:prstGeom prst="rect">
             <a:avLst/>
@@ -2826,7 +2826,7 @@
               <a:buNone/>
             </a:pPr>
             <a:r>
-              <a:rPr lang="en-US" sz="950" dirty="0">
+              <a:rPr lang="en-US" sz="1050" dirty="0">
                 <a:solidFill>
                   <a:srgbClr val="C9A84C"/>
                 </a:solidFill>
@@ -2836,7 +2836,7 @@
               </a:rPr>
               <a:t>MOIC: 1.08x</a:t>
             </a:r>
-            <a:endParaRPr lang="en-US" sz="950" dirty="0"/>
+            <a:endParaRPr lang="en-US" sz="1050" dirty="0"/>
           </a:p>
         </p:txBody>
       </p:sp>
@@ -11760,15 +11760,15 @@
             <a:tbl>
               <a:tblPr/>
               <a:tblGrid>
-                <a:gridCol w="2286000"/>
-                <a:gridCol w="1371600"/>
+                <a:gridCol w="2926080"/>
+                <a:gridCol w="1737360"/>
+                <a:gridCol w="1280160"/>
                 <a:gridCol w="914400"/>
-                <a:gridCol w="685800"/>
-                <a:gridCol w="1143000"/>
-                <a:gridCol w="685800"/>
-                <a:gridCol w="1371600"/>
+                <a:gridCol w="1463040"/>
+                <a:gridCol w="822960"/>
+                <a:gridCol w="1645920"/>
               </a:tblGrid>
-              <a:tr h="365760">
+              <a:tr h="402336">
                 <a:tc>
                   <a:txBody>
                     <a:bodyPr/>
@@ -12246,7 +12246,7 @@
                   </a:tcPr>
                 </a:tc>
               </a:tr>
-              <a:tr h="365760">
+              <a:tr h="402336">
                 <a:tc>
                   <a:txBody>
                     <a:bodyPr/>
@@ -12724,7 +12724,7 @@
                   </a:tcPr>
                 </a:tc>
               </a:tr>
-              <a:tr h="365760">
+              <a:tr h="402336">
                 <a:tc>
                   <a:txBody>
                     <a:bodyPr/>
@@ -17739,12 +17739,12 @@
         </p:nvSpPr>
         <p:spPr>
           <a:xfrm>
-            <a:off x="914400" y="4937760"/>
-            <a:ext cx="10332720" cy="1280160"/>
+            <a:off x="731520" y="4663440"/>
+            <a:ext cx="10789920" cy="1691640"/>
           </a:xfrm>
           <a:prstGeom prst="roundRect">
             <a:avLst>
-              <a:gd name="adj" fmla="val 2857"/>
+              <a:gd name="adj" fmla="val 2162"/>
             </a:avLst>
           </a:prstGeom>
           <a:solidFill>
@@ -17766,8 +17766,8 @@
         </p:nvSpPr>
         <p:spPr>
           <a:xfrm>
-            <a:off x="1097280" y="5029200"/>
-            <a:ext cx="1828800" cy="274320"/>
+            <a:off x="960120" y="4773168"/>
+            <a:ext cx="2286000" cy="320040"/>
           </a:xfrm>
           <a:prstGeom prst="rect">
             <a:avLst/>
@@ -17783,7 +17783,7 @@
               <a:buNone/>
             </a:pPr>
             <a:r>
-              <a:rPr lang="en-US" sz="900" b="1" dirty="0">
+              <a:rPr lang="en-US" sz="1100" b="1" dirty="0">
                 <a:solidFill>
                   <a:srgbClr val="C9A84C"/>
                 </a:solidFill>
@@ -17793,7 +17793,7 @@
               </a:rPr>
               <a:t>Market Context</a:t>
             </a:r>
-            <a:endParaRPr lang="en-US" sz="900" dirty="0"/>
+            <a:endParaRPr lang="en-US" sz="1100" dirty="0"/>
           </a:p>
         </p:txBody>
       </p:sp>
@@ -17805,8 +17805,8 @@
         </p:nvSpPr>
         <p:spPr>
           <a:xfrm>
-            <a:off x="1097280" y="5321808"/>
-            <a:ext cx="9966960" cy="777240"/>
+            <a:off x="960120" y="5120640"/>
+            <a:ext cx="10332720" cy="1097280"/>
           </a:xfrm>
           <a:prstGeom prst="rect">
             <a:avLst/>
@@ -17822,7 +17822,7 @@
               <a:buNone/>
             </a:pPr>
             <a:r>
-              <a:rPr lang="en-US" sz="950" dirty="0">
+              <a:rPr lang="en-US" sz="1150" dirty="0">
                 <a:solidFill>
                   <a:srgbClr val="AABDD0"/>
                 </a:solidFill>
@@ -17832,7 +17832,7 @@
               </a:rPr>
               <a:t>SOFR has stabilized in the 5.30–5.35% range, keeping floating-rate coupon income near cycle highs. Sunbelt multifamily fundamentals remain strong with vacancy rates below 5% in the fund's key markets. Industrial demand continues to benefit from e-commerce tailwinds and near-shoring activity.</a:t>
             </a:r>
-            <a:endParaRPr lang="en-US" sz="950" dirty="0"/>
+            <a:endParaRPr lang="en-US" sz="1150" dirty="0"/>
           </a:p>
         </p:txBody>
       </p:sp>
@@ -18070,7 +18070,7 @@
                 <a:gridCol w="6858000"/>
                 <a:gridCol w="4389120"/>
               </a:tblGrid>
-              <a:tr h="329184">
+              <a:tr h="384048">
                 <a:tc>
                   <a:txBody>
                     <a:bodyPr/>
@@ -18208,7 +18208,7 @@
                   </a:tcPr>
                 </a:tc>
               </a:tr>
-              <a:tr h="329184">
+              <a:tr h="384048">
                 <a:tc>
                   <a:txBody>
                     <a:bodyPr/>
@@ -18335,7 +18335,7 @@
                   </a:tcPr>
                 </a:tc>
               </a:tr>
-              <a:tr h="329184">
+              <a:tr h="384048">
                 <a:tc>
                   <a:txBody>
                     <a:bodyPr/>
@@ -18473,7 +18473,7 @@
                   </a:tcPr>
                 </a:tc>
               </a:tr>
-              <a:tr h="329184">
+              <a:tr h="384048">
                 <a:tc>
                   <a:txBody>
                     <a:bodyPr/>
@@ -18611,7 +18611,7 @@
                   </a:tcPr>
                 </a:tc>
               </a:tr>
-              <a:tr h="329184">
+              <a:tr h="384048">
                 <a:tc>
                   <a:txBody>
                     <a:bodyPr/>
@@ -18749,7 +18749,7 @@
                   </a:tcPr>
                 </a:tc>
               </a:tr>
-              <a:tr h="329184">
+              <a:tr h="384048">
                 <a:tc>
                   <a:txBody>
                     <a:bodyPr/>
@@ -18876,7 +18876,7 @@
                   </a:tcPr>
                 </a:tc>
               </a:tr>
-              <a:tr h="329184">
+              <a:tr h="384048">
                 <a:tc>
                   <a:txBody>
                     <a:bodyPr/>
@@ -19014,7 +19014,7 @@
                   </a:tcPr>
                 </a:tc>
               </a:tr>
-              <a:tr h="329184">
+              <a:tr h="384048">
                 <a:tc>
                   <a:txBody>
                     <a:bodyPr/>
@@ -19152,7 +19152,7 @@
                   </a:tcPr>
                 </a:tc>
               </a:tr>
-              <a:tr h="329184">
+              <a:tr h="384048">
                 <a:tc>
                   <a:txBody>
                     <a:bodyPr/>
@@ -19290,7 +19290,7 @@
                   </a:tcPr>
                 </a:tc>
               </a:tr>
-              <a:tr h="329184">
+              <a:tr h="384048">
                 <a:tc>
                   <a:txBody>
                     <a:bodyPr/>
@@ -19417,7 +19417,7 @@
                   </a:tcPr>
                 </a:tc>
               </a:tr>
-              <a:tr h="329184">
+              <a:tr h="384048">
                 <a:tc>
                   <a:txBody>
                     <a:bodyPr/>
@@ -19555,7 +19555,7 @@
                   </a:tcPr>
                 </a:tc>
               </a:tr>
-              <a:tr h="329184">
+              <a:tr h="384048">
                 <a:tc>
                   <a:txBody>
                     <a:bodyPr/>
@@ -19693,7 +19693,7 @@
                   </a:tcPr>
                 </a:tc>
               </a:tr>
-              <a:tr h="329184">
+              <a:tr h="384048">
                 <a:tc>
                   <a:txBody>
                     <a:bodyPr/>
@@ -19831,7 +19831,7 @@
                   </a:tcPr>
                 </a:tc>
               </a:tr>
-              <a:tr h="329184">
+              <a:tr h="384048">
                 <a:tc>
                   <a:txBody>
                     <a:bodyPr/>
@@ -19958,7 +19958,7 @@
                   </a:tcPr>
                 </a:tc>
               </a:tr>
-              <a:tr h="329184">
+              <a:tr h="384048">
                 <a:tc>
                   <a:txBody>
                     <a:bodyPr/>
